--- a/slides/quiz_challenge_2.pptx
+++ b/slides/quiz_challenge_2.pptx
@@ -6179,13 +6179,19 @@
       </p:sp>
       <p:sp>
         <p:nvSpPr>
-          <p:cNvPr id="24" name="Text 22"/>
-          <p:cNvSpPr/>
-          <p:nvPr/>
-        </p:nvSpPr>
-        <p:spPr>
-          <a:xfrm>
-            <a:off x="7772400" y="6309360"/>
+          <p:cNvPr id="20" name="Text 22">
+            <a:extLst>
+              <a:ext uri="{FF2B5EF4-FFF2-40B4-BE49-F238E27FC236}">
+                <a16:creationId xmlns:a16="http://schemas.microsoft.com/office/drawing/2014/main" id="{952BF28F-D15C-9226-AC23-69390D45E495}"/>
+              </a:ext>
+            </a:extLst>
+          </p:cNvPr>
+          <p:cNvSpPr/>
+          <p:nvPr/>
+        </p:nvSpPr>
+        <p:spPr>
+          <a:xfrm>
+            <a:off x="7498080" y="6309360"/>
             <a:ext cx="4114800" cy="274320"/>
           </a:xfrm>
           <a:prstGeom prst="rect">
@@ -6198,19 +6204,11 @@
           <a:bodyPr wrap="square" lIns="0" tIns="0" rIns="0" bIns="0" rtlCol="0" anchor="ctr"/>
           <a:lstStyle/>
           <a:p>
-            <a:pPr marL="0" indent="0">
-              <a:buNone/>
-            </a:pPr>
             <a:r>
               <a:rPr lang="en-US" sz="1100" dirty="0">
-                <a:solidFill>
-                  <a:srgbClr val="1A1A1A"/>
-                </a:solidFill>
-                <a:latin typeface="Consolas" pitchFamily="34" charset="0"/>
-                <a:ea typeface="Consolas" pitchFamily="34" charset="-122"/>
-                <a:cs typeface="Consolas" pitchFamily="34" charset="-120"/>
-              </a:rPr>
-              <a:t>[link to be added]</a:t>
+                <a:hlinkClick r:id="rId3"/>
+              </a:rPr>
+              <a:t>Screen Recording 2026-04-23 at 2.57.53 PM.mov</a:t>
             </a:r>
             <a:endParaRPr lang="en-US" sz="1100" dirty="0"/>
           </a:p>
